--- a/assets/powerpoints/module-n2-inscription/C2-mon-nom-votre-nom.pptx
+++ b/assets/powerpoints/module-n2-inscription/C2-mon-nom-votre-nom.pptx
@@ -9164,13 +9164,76 @@
               </a:lnSpc>
             </a:pPr>
             <a:r>
+              <a:rPr sz="2000" b="1" i="0">
+                <a:solidFill>
+                  <a:srgbClr val="4B4F52"/>
+                </a:solidFill>
+                <a:latin typeface="Verdana"/>
+              </a:rPr>
+              <a:t>Mon</a:t>
+            </a:r>
+            <a:r>
               <a:rPr sz="2000" b="0" i="0">
                 <a:solidFill>
                   <a:srgbClr val="4B4F52"/>
                 </a:solidFill>
                 <a:latin typeface="Verdana"/>
               </a:rPr>
-              <a:t>&lt;b&gt;Mon&lt;/b&gt; devant un mot masculin : mon nom, mon prénom, mon courriel. &lt;b&gt;Ma&lt;/b&gt; devant un mot féminin : ma rue, ma signature. &lt;b&gt;Mes&lt;/b&gt; devant plusieurs choses : mes papiers. Et &lt;b&gt;votre&lt;/b&gt; ne change jamais au singulier, masculin ou féminin.</a:t>
+              <a:t> devant un mot masculin : mon nom, mon prénom, mon courriel. </a:t>
+            </a:r>
+            <a:r>
+              <a:rPr sz="2000" b="1" i="0">
+                <a:solidFill>
+                  <a:srgbClr val="4B4F52"/>
+                </a:solidFill>
+                <a:latin typeface="Verdana"/>
+              </a:rPr>
+              <a:t>Ma</a:t>
+            </a:r>
+            <a:r>
+              <a:rPr sz="2000" b="0" i="0">
+                <a:solidFill>
+                  <a:srgbClr val="4B4F52"/>
+                </a:solidFill>
+                <a:latin typeface="Verdana"/>
+              </a:rPr>
+              <a:t> devant un mot féminin : ma rue, ma signature. </a:t>
+            </a:r>
+            <a:r>
+              <a:rPr sz="2000" b="1" i="0">
+                <a:solidFill>
+                  <a:srgbClr val="4B4F52"/>
+                </a:solidFill>
+                <a:latin typeface="Verdana"/>
+              </a:rPr>
+              <a:t>Mes</a:t>
+            </a:r>
+            <a:r>
+              <a:rPr sz="2000" b="0" i="0">
+                <a:solidFill>
+                  <a:srgbClr val="4B4F52"/>
+                </a:solidFill>
+                <a:latin typeface="Verdana"/>
+              </a:rPr>
+              <a:t> devant plusieurs choses : mes papiers. Et </a:t>
+            </a:r>
+            <a:r>
+              <a:rPr sz="2000" b="1" i="0">
+                <a:solidFill>
+                  <a:srgbClr val="4B4F52"/>
+                </a:solidFill>
+                <a:latin typeface="Verdana"/>
+              </a:rPr>
+              <a:t>votre</a:t>
+            </a:r>
+            <a:r>
+              <a:rPr sz="2000" b="0" i="0">
+                <a:solidFill>
+                  <a:srgbClr val="4B4F52"/>
+                </a:solidFill>
+                <a:latin typeface="Verdana"/>
+              </a:rPr>
+              <a:t> ne change jamais au singulier, masculin ou féminin.</a:t>
             </a:r>
           </a:p>
         </p:txBody>
@@ -9719,7 +9782,43 @@
                 </a:solidFill>
                 <a:latin typeface="Verdana"/>
               </a:rPr>
-              <a:t>Adresse est un mot féminin, mais il commence par une voyelle. Devant &lt;b&gt;a, e, i, o, u&lt;/b&gt;, le féminin prend &lt;b&gt;mon&lt;/b&gt; : mon adresse, mon école, mon inscription. La raison est simple — deux voyelles collées se disent mal, et le français les évite partout.</a:t>
+              <a:t>Adresse est un mot féminin, mais il commence par une voyelle. Devant </a:t>
+            </a:r>
+            <a:r>
+              <a:rPr sz="2000" b="1" i="0">
+                <a:solidFill>
+                  <a:srgbClr val="4B4F52"/>
+                </a:solidFill>
+                <a:latin typeface="Verdana"/>
+              </a:rPr>
+              <a:t>a, e, i, o, u</a:t>
+            </a:r>
+            <a:r>
+              <a:rPr sz="2000" b="0" i="0">
+                <a:solidFill>
+                  <a:srgbClr val="4B4F52"/>
+                </a:solidFill>
+                <a:latin typeface="Verdana"/>
+              </a:rPr>
+              <a:t>, le féminin prend </a:t>
+            </a:r>
+            <a:r>
+              <a:rPr sz="2000" b="1" i="0">
+                <a:solidFill>
+                  <a:srgbClr val="4B4F52"/>
+                </a:solidFill>
+                <a:latin typeface="Verdana"/>
+              </a:rPr>
+              <a:t>mon</a:t>
+            </a:r>
+            <a:r>
+              <a:rPr sz="2000" b="0" i="0">
+                <a:solidFill>
+                  <a:srgbClr val="4B4F52"/>
+                </a:solidFill>
+                <a:latin typeface="Verdana"/>
+              </a:rPr>
+              <a:t> : mon adresse, mon école, mon inscription. La raison est simple — deux voyelles collées se disent mal, et le français les évite partout.</a:t>
             </a:r>
           </a:p>
         </p:txBody>
